--- a/images/source/conformance-module-resources.pptx
+++ b/images/source/conformance-module-resources.pptx
@@ -3969,71 +3969,6 @@
       </p:sp>
       <p:sp>
         <p:nvSpPr>
-          <p:cNvPr id="49" name="Rounded Rectangle 48"/>
-          <p:cNvSpPr/>
-          <p:nvPr/>
-        </p:nvSpPr>
-        <p:spPr>
-          <a:xfrm>
-            <a:off x="3618057" y="5716457"/>
-            <a:ext cx="2484581" cy="769874"/>
-          </a:xfrm>
-          <a:prstGeom prst="roundRect">
-            <a:avLst/>
-          </a:prstGeom>
-          <a:solidFill>
-            <a:srgbClr val="CEE1F2"/>
-          </a:solidFill>
-          <a:ln cap="rnd">
-            <a:round/>
-          </a:ln>
-          <a:effectLst>
-            <a:outerShdw blurRad="50800" dist="38100" dir="2700000" algn="tl" rotWithShape="0">
-              <a:prstClr val="black">
-                <a:alpha val="40000"/>
-              </a:prstClr>
-            </a:outerShdw>
-          </a:effectLst>
-        </p:spPr>
-        <p:style>
-          <a:lnRef idx="2">
-            <a:schemeClr val="accent1">
-              <a:shade val="50000"/>
-            </a:schemeClr>
-          </a:lnRef>
-          <a:fillRef idx="1">
-            <a:schemeClr val="accent1"/>
-          </a:fillRef>
-          <a:effectRef idx="0">
-            <a:schemeClr val="accent1"/>
-          </a:effectRef>
-          <a:fontRef idx="minor">
-            <a:schemeClr val="lt1"/>
-          </a:fontRef>
-        </p:style>
-        <p:txBody>
-          <a:bodyPr rtlCol="0" anchor="ctr"/>
-          <a:lstStyle/>
-          <a:p>
-            <a:pPr algn="ctr"/>
-            <a:r>
-              <a:rPr lang="en-US" dirty="0" err="1" smtClean="0">
-                <a:solidFill>
-                  <a:schemeClr val="tx1"/>
-                </a:solidFill>
-              </a:rPr>
-              <a:t>NamingSystem</a:t>
-            </a:r>
-            <a:endParaRPr lang="en-US" dirty="0" smtClean="0">
-              <a:solidFill>
-                <a:schemeClr val="tx1"/>
-              </a:solidFill>
-            </a:endParaRPr>
-          </a:p>
-        </p:txBody>
-      </p:sp>
-      <p:sp>
-        <p:nvSpPr>
           <p:cNvPr id="51" name="Rounded Rectangle 50"/>
           <p:cNvSpPr/>
           <p:nvPr/>
